--- a/analyses-project/guidance/W1_Project_launch.pptx
+++ b/analyses-project/guidance/W1_Project_launch.pptx
@@ -5506,7 +5506,7 @@
                 <a:ea typeface="Calibri" pitchFamily="34" charset="-122"/>
                 <a:cs typeface="Calibri" pitchFamily="34" charset="-120"/>
               </a:rPr>
-              <a:t>Full descriptors are in the handbook (§9). The same scheme applies all year, so you know from day one what ‘good’ looks like.</a:t>
+              <a:t>Full descriptors are in the Student Guide (§7). The same scheme applies all year, so you know from day one what ‘good’ looks like.</a:t>
             </a:r>
             <a:endParaRPr lang="en-US" sz="1350" dirty="0"/>
           </a:p>
@@ -7570,7 +7570,7 @@
                 <a:ea typeface="Calibri" pitchFamily="34" charset="-122"/>
                 <a:cs typeface="Calibri" pitchFamily="34" charset="-120"/>
               </a:rPr>
-              <a:t>Read the handbook</a:t>
+              <a:t>Read the Student Guide</a:t>
             </a:r>
             <a:endParaRPr lang="en-US" sz="1600" dirty="0"/>
           </a:p>
@@ -7613,7 +7613,7 @@
                 <a:ea typeface="Calibri" pitchFamily="34" charset="-122"/>
                 <a:cs typeface="Calibri" pitchFamily="34" charset="-120"/>
               </a:rPr>
-              <a:t>§1–3</a:t>
+              <a:t>§1–2</a:t>
             </a:r>
             <a:r>
               <a:rPr lang="en-US" sz="1350" dirty="0">
@@ -7624,7 +7624,7 @@
                 <a:ea typeface="Calibri" pitchFamily="34" charset="-122"/>
                 <a:cs typeface="Calibri" pitchFamily="34" charset="-120"/>
               </a:rPr>
-              <a:t>: the project, ERA5, ENSO and clouds</a:t>
+              <a:t>: the project at a glance; the science</a:t>
             </a:r>
             <a:endParaRPr lang="en-US" sz="1350" dirty="0"/>
           </a:p>
@@ -7645,7 +7645,7 @@
                 <a:ea typeface="Calibri" pitchFamily="34" charset="-122"/>
                 <a:cs typeface="Calibri" pitchFamily="34" charset="-120"/>
               </a:rPr>
-              <a:t>Skim §9 (marking)</a:t>
+              <a:t>Skim §7 (marking)</a:t>
             </a:r>
             <a:endParaRPr lang="en-US" sz="1350" dirty="0"/>
           </a:p>
@@ -7827,29 +7827,7 @@
                 <a:ea typeface="Calibri" pitchFamily="34" charset="-122"/>
                 <a:cs typeface="Calibri" pitchFamily="34" charset="-120"/>
               </a:rPr>
-              <a:t>Sections 0–3. Analysis slides: </a:t>
-            </a:r>
-            <a:r>
-              <a:rPr lang="en-US" sz="1350" b="1" dirty="0">
-                <a:solidFill>
-                  <a:srgbClr val="222B36"/>
-                </a:solidFill>
-                <a:latin typeface="Calibri" pitchFamily="34" charset="0"/>
-                <a:ea typeface="Calibri" pitchFamily="34" charset="-122"/>
-                <a:cs typeface="Calibri" pitchFamily="34" charset="-120"/>
-              </a:rPr>
-              <a:t>01 Project launch</a:t>
-            </a:r>
-            <a:r>
-              <a:rPr lang="en-US" sz="1350" dirty="0">
-                <a:solidFill>
-                  <a:srgbClr val="222B36"/>
-                </a:solidFill>
-                <a:latin typeface="Calibri" pitchFamily="34" charset="0"/>
-                <a:ea typeface="Calibri" pitchFamily="34" charset="-122"/>
-                <a:cs typeface="Calibri" pitchFamily="34" charset="-120"/>
-              </a:rPr>
-              <a:t> (and 02 if you're keen).</a:t>
+              <a:t>Sections 0–3. Each section opens with a short explanation: read it before running the cells.</a:t>
             </a:r>
             <a:endParaRPr lang="en-US" sz="1350" dirty="0"/>
           </a:p>
@@ -9255,7 +9233,7 @@
                 <a:ea typeface="Calibri" pitchFamily="34" charset="-122"/>
                 <a:cs typeface="Calibri" pitchFamily="34" charset="-120"/>
               </a:rPr>
-              <a:t>The student handbook</a:t>
+              <a:t>The Student Guide</a:t>
             </a:r>
             <a:endParaRPr lang="en-US" sz="1400" dirty="0"/>
           </a:p>
